--- a/day1/img/data_storage.pptx
+++ b/day1/img/data_storage.pptx
@@ -104,6 +104,11 @@
       </a:defRPr>
     </a:lvl9pPr>
   </p:defaultTextStyle>
+  <p:extLst>
+    <p:ext uri="{EFAFB233-063F-42B5-8137-9DF3F51BA10A}">
+      <p15:sldGuideLst xmlns:p15="http://schemas.microsoft.com/office/powerpoint/2012/main"/>
+    </p:ext>
+  </p:extLst>
 </p:presentation>
 </file>
 
@@ -12536,10 +12541,10 @@
       </p:grpSp>
       <p:grpSp>
         <p:nvGrpSpPr>
-          <p:cNvPr id="16" name="Group 15">
+          <p:cNvPr id="2" name="Group 1">
             <a:extLst>
               <a:ext uri="{FF2B5EF4-FFF2-40B4-BE49-F238E27FC236}">
-                <a16:creationId xmlns:a16="http://schemas.microsoft.com/office/drawing/2014/main" id="{0C994A74-4C2A-7A4E-87DE-80373B560AA4}"/>
+                <a16:creationId xmlns:a16="http://schemas.microsoft.com/office/drawing/2014/main" id="{8BA9D8ED-319E-17F6-85E3-FA6F0B3A7D86}"/>
               </a:ext>
             </a:extLst>
           </p:cNvPr>
@@ -12547,11 +12552,11 @@
           <p:nvPr/>
         </p:nvGrpSpPr>
         <p:grpSpPr>
-          <a:xfrm>
-            <a:off x="6462699" y="2967701"/>
-            <a:ext cx="5684145" cy="2454164"/>
-            <a:chOff x="3589722" y="2225775"/>
-            <a:chExt cx="4263109" cy="1840623"/>
+          <a:xfrm rot="16200000" flipH="1" flipV="1">
+            <a:off x="6887472" y="3196712"/>
+            <a:ext cx="2051141" cy="2059188"/>
+            <a:chOff x="6887472" y="3027896"/>
+            <a:chExt cx="2051141" cy="2059188"/>
           </a:xfrm>
         </p:grpSpPr>
         <p:sp>
@@ -12568,8 +12573,8 @@
           </p:nvSpPr>
           <p:spPr>
             <a:xfrm rot="10800000">
-              <a:off x="5254172" y="3233564"/>
-              <a:ext cx="192485" cy="192485"/>
+              <a:off x="8681966" y="4311420"/>
+              <a:ext cx="256647" cy="256647"/>
             </a:xfrm>
             <a:prstGeom prst="rect">
               <a:avLst/>
@@ -12626,8 +12631,8 @@
           </p:nvSpPr>
           <p:spPr>
             <a:xfrm rot="10800000">
-              <a:off x="5061687" y="3233546"/>
-              <a:ext cx="192485" cy="192485"/>
+              <a:off x="8425319" y="4311396"/>
+              <a:ext cx="256647" cy="256647"/>
             </a:xfrm>
             <a:prstGeom prst="rect">
               <a:avLst/>
@@ -12684,8 +12689,8 @@
           </p:nvSpPr>
           <p:spPr>
             <a:xfrm rot="10800000">
-              <a:off x="4869203" y="3233546"/>
-              <a:ext cx="192485" cy="192485"/>
+              <a:off x="8168674" y="4311396"/>
+              <a:ext cx="256647" cy="256647"/>
             </a:xfrm>
             <a:prstGeom prst="rect">
               <a:avLst/>
@@ -12742,8 +12747,8 @@
           </p:nvSpPr>
           <p:spPr>
             <a:xfrm rot="10800000">
-              <a:off x="4676718" y="3233546"/>
-              <a:ext cx="192485" cy="192485"/>
+              <a:off x="7912027" y="4311396"/>
+              <a:ext cx="256647" cy="256647"/>
             </a:xfrm>
             <a:prstGeom prst="rect">
               <a:avLst/>
@@ -12800,8 +12805,8 @@
           </p:nvSpPr>
           <p:spPr>
             <a:xfrm rot="10800000">
-              <a:off x="4484233" y="3233546"/>
-              <a:ext cx="192485" cy="192485"/>
+              <a:off x="7655380" y="4311396"/>
+              <a:ext cx="256647" cy="256647"/>
             </a:xfrm>
             <a:prstGeom prst="rect">
               <a:avLst/>
@@ -12858,8 +12863,8 @@
           </p:nvSpPr>
           <p:spPr>
             <a:xfrm rot="10800000">
-              <a:off x="5254171" y="3041110"/>
-              <a:ext cx="192485" cy="192485"/>
+              <a:off x="8681964" y="4054814"/>
+              <a:ext cx="256647" cy="256647"/>
             </a:xfrm>
             <a:prstGeom prst="rect">
               <a:avLst/>
@@ -12917,8 +12922,8 @@
           </p:nvSpPr>
           <p:spPr>
             <a:xfrm rot="10800000">
-              <a:off x="5061686" y="3041077"/>
-              <a:ext cx="192485" cy="192485"/>
+              <a:off x="8425318" y="4054770"/>
+              <a:ext cx="256647" cy="256647"/>
             </a:xfrm>
             <a:prstGeom prst="rect">
               <a:avLst/>
@@ -12976,8 +12981,8 @@
           </p:nvSpPr>
           <p:spPr>
             <a:xfrm rot="10800000">
-              <a:off x="4869202" y="3041077"/>
-              <a:ext cx="192485" cy="192485"/>
+              <a:off x="8168672" y="4054770"/>
+              <a:ext cx="256647" cy="256647"/>
             </a:xfrm>
             <a:prstGeom prst="rect">
               <a:avLst/>
@@ -13035,8 +13040,8 @@
           </p:nvSpPr>
           <p:spPr>
             <a:xfrm rot="10800000">
-              <a:off x="4676717" y="3041077"/>
-              <a:ext cx="192485" cy="192485"/>
+              <a:off x="7912026" y="4054770"/>
+              <a:ext cx="256647" cy="256647"/>
             </a:xfrm>
             <a:prstGeom prst="rect">
               <a:avLst/>
@@ -13094,8 +13099,8 @@
           </p:nvSpPr>
           <p:spPr>
             <a:xfrm rot="10800000">
-              <a:off x="4484232" y="3041077"/>
-              <a:ext cx="192485" cy="192485"/>
+              <a:off x="7655379" y="4054770"/>
+              <a:ext cx="256647" cy="256647"/>
             </a:xfrm>
             <a:prstGeom prst="rect">
               <a:avLst/>
@@ -13153,8 +13158,8 @@
           </p:nvSpPr>
           <p:spPr>
             <a:xfrm rot="10800000">
-              <a:off x="5254171" y="2848656"/>
-              <a:ext cx="192485" cy="192485"/>
+              <a:off x="8681964" y="3798209"/>
+              <a:ext cx="256647" cy="256647"/>
             </a:xfrm>
             <a:prstGeom prst="rect">
               <a:avLst/>
@@ -13212,8 +13217,8 @@
           </p:nvSpPr>
           <p:spPr>
             <a:xfrm rot="10800000">
-              <a:off x="5254171" y="2656202"/>
-              <a:ext cx="192485" cy="192485"/>
+              <a:off x="8681964" y="3541604"/>
+              <a:ext cx="256647" cy="256647"/>
             </a:xfrm>
             <a:prstGeom prst="rect">
               <a:avLst/>
@@ -13271,8 +13276,8 @@
           </p:nvSpPr>
           <p:spPr>
             <a:xfrm rot="10800000">
-              <a:off x="5254171" y="2463748"/>
-              <a:ext cx="192485" cy="192485"/>
+              <a:off x="8681964" y="3284998"/>
+              <a:ext cx="256647" cy="256647"/>
             </a:xfrm>
             <a:prstGeom prst="rect">
               <a:avLst/>
@@ -13330,8 +13335,8 @@
           </p:nvSpPr>
           <p:spPr>
             <a:xfrm rot="10800000">
-              <a:off x="4291749" y="3233546"/>
-              <a:ext cx="192485" cy="192485"/>
+              <a:off x="7398735" y="4311396"/>
+              <a:ext cx="256647" cy="256647"/>
             </a:xfrm>
             <a:prstGeom prst="rect">
               <a:avLst/>
@@ -13388,8 +13393,8 @@
           </p:nvSpPr>
           <p:spPr>
             <a:xfrm rot="10800000">
-              <a:off x="4291748" y="3041077"/>
-              <a:ext cx="192485" cy="192485"/>
+              <a:off x="7398734" y="4054770"/>
+              <a:ext cx="256647" cy="256647"/>
             </a:xfrm>
             <a:prstGeom prst="rect">
               <a:avLst/>
@@ -13447,8 +13452,8 @@
           </p:nvSpPr>
           <p:spPr>
             <a:xfrm rot="10800000">
-              <a:off x="5254171" y="2271294"/>
-              <a:ext cx="192485" cy="192485"/>
+              <a:off x="8681964" y="3028393"/>
+              <a:ext cx="256647" cy="256647"/>
             </a:xfrm>
             <a:prstGeom prst="rect">
               <a:avLst/>
@@ -13505,8 +13510,8 @@
           </p:nvSpPr>
           <p:spPr>
             <a:xfrm rot="10800000">
-              <a:off x="5254171" y="3622827"/>
-              <a:ext cx="192485" cy="192485"/>
+              <a:off x="8681964" y="4830437"/>
+              <a:ext cx="256647" cy="256647"/>
             </a:xfrm>
             <a:prstGeom prst="rect">
               <a:avLst/>
@@ -13566,8 +13571,8 @@
           </p:nvSpPr>
           <p:spPr>
             <a:xfrm rot="10800000">
-              <a:off x="4100788" y="3231866"/>
-              <a:ext cx="192485" cy="192485"/>
+              <a:off x="7144120" y="4309156"/>
+              <a:ext cx="256647" cy="256647"/>
             </a:xfrm>
             <a:prstGeom prst="rect">
               <a:avLst/>
@@ -13624,8 +13629,8 @@
           </p:nvSpPr>
           <p:spPr>
             <a:xfrm rot="10800000">
-              <a:off x="3908303" y="3231866"/>
-              <a:ext cx="192485" cy="192485"/>
+              <a:off x="6887474" y="4309156"/>
+              <a:ext cx="256647" cy="256647"/>
             </a:xfrm>
             <a:prstGeom prst="rect">
               <a:avLst/>
@@ -13682,8 +13687,8 @@
           </p:nvSpPr>
           <p:spPr>
             <a:xfrm rot="10800000">
-              <a:off x="4100787" y="3039677"/>
-              <a:ext cx="192485" cy="192485"/>
+              <a:off x="7144119" y="4052904"/>
+              <a:ext cx="256647" cy="256647"/>
             </a:xfrm>
             <a:prstGeom prst="rect">
               <a:avLst/>
@@ -13741,8 +13746,8 @@
           </p:nvSpPr>
           <p:spPr>
             <a:xfrm rot="10800000">
-              <a:off x="3908302" y="3039677"/>
-              <a:ext cx="192485" cy="192485"/>
+              <a:off x="6887472" y="4052904"/>
+              <a:ext cx="256647" cy="256647"/>
             </a:xfrm>
             <a:prstGeom prst="rect">
               <a:avLst/>
@@ -13800,8 +13805,8 @@
           </p:nvSpPr>
           <p:spPr>
             <a:xfrm>
-              <a:off x="3908302" y="3622719"/>
-              <a:ext cx="192485" cy="192485"/>
+              <a:off x="6887472" y="4830293"/>
+              <a:ext cx="256647" cy="256647"/>
             </a:xfrm>
             <a:prstGeom prst="rect">
               <a:avLst/>
@@ -13861,8 +13866,8 @@
           </p:nvSpPr>
           <p:spPr>
             <a:xfrm>
-              <a:off x="4100787" y="3622719"/>
-              <a:ext cx="192485" cy="192485"/>
+              <a:off x="7144119" y="4830293"/>
+              <a:ext cx="256647" cy="256647"/>
             </a:xfrm>
             <a:prstGeom prst="rect">
               <a:avLst/>
@@ -13922,8 +13927,8 @@
           </p:nvSpPr>
           <p:spPr>
             <a:xfrm>
-              <a:off x="4291748" y="3622719"/>
-              <a:ext cx="192485" cy="192485"/>
+              <a:off x="7398734" y="4830293"/>
+              <a:ext cx="256647" cy="256647"/>
             </a:xfrm>
             <a:prstGeom prst="rect">
               <a:avLst/>
@@ -13983,8 +13988,8 @@
           </p:nvSpPr>
           <p:spPr>
             <a:xfrm>
-              <a:off x="4484232" y="3622719"/>
-              <a:ext cx="192485" cy="192485"/>
+              <a:off x="7655379" y="4830293"/>
+              <a:ext cx="256647" cy="256647"/>
             </a:xfrm>
             <a:prstGeom prst="rect">
               <a:avLst/>
@@ -14044,8 +14049,8 @@
           </p:nvSpPr>
           <p:spPr>
             <a:xfrm>
-              <a:off x="4676717" y="3622719"/>
-              <a:ext cx="192485" cy="192485"/>
+              <a:off x="7912026" y="4830293"/>
+              <a:ext cx="256647" cy="256647"/>
             </a:xfrm>
             <a:prstGeom prst="rect">
               <a:avLst/>
@@ -14105,8 +14110,8 @@
           </p:nvSpPr>
           <p:spPr>
             <a:xfrm>
-              <a:off x="4869202" y="3622719"/>
-              <a:ext cx="192485" cy="192485"/>
+              <a:off x="8168672" y="4830293"/>
+              <a:ext cx="256647" cy="256647"/>
             </a:xfrm>
             <a:prstGeom prst="rect">
               <a:avLst/>
@@ -14166,8 +14171,8 @@
           </p:nvSpPr>
           <p:spPr>
             <a:xfrm>
-              <a:off x="3908302" y="2270921"/>
-              <a:ext cx="192485" cy="192485"/>
+              <a:off x="6887472" y="3027896"/>
+              <a:ext cx="256647" cy="256647"/>
             </a:xfrm>
             <a:prstGeom prst="rect">
               <a:avLst/>
@@ -14224,8 +14229,8 @@
           </p:nvSpPr>
           <p:spPr>
             <a:xfrm>
-              <a:off x="4100787" y="2270921"/>
-              <a:ext cx="192485" cy="192485"/>
+              <a:off x="7144119" y="3027896"/>
+              <a:ext cx="256647" cy="256647"/>
             </a:xfrm>
             <a:prstGeom prst="rect">
               <a:avLst/>
@@ -14282,8 +14287,8 @@
           </p:nvSpPr>
           <p:spPr>
             <a:xfrm>
-              <a:off x="4291748" y="2271201"/>
-              <a:ext cx="192485" cy="192485"/>
+              <a:off x="7398734" y="3028269"/>
+              <a:ext cx="256647" cy="256647"/>
             </a:xfrm>
             <a:prstGeom prst="rect">
               <a:avLst/>
@@ -14340,8 +14345,8 @@
           </p:nvSpPr>
           <p:spPr>
             <a:xfrm>
-              <a:off x="4484232" y="2271201"/>
-              <a:ext cx="192485" cy="192485"/>
+              <a:off x="7655379" y="3028269"/>
+              <a:ext cx="256647" cy="256647"/>
             </a:xfrm>
             <a:prstGeom prst="rect">
               <a:avLst/>
@@ -14398,8 +14403,8 @@
           </p:nvSpPr>
           <p:spPr>
             <a:xfrm>
-              <a:off x="4676717" y="2271201"/>
-              <a:ext cx="192485" cy="192485"/>
+              <a:off x="7912026" y="3028269"/>
+              <a:ext cx="256647" cy="256647"/>
             </a:xfrm>
             <a:prstGeom prst="rect">
               <a:avLst/>
@@ -14456,8 +14461,8 @@
           </p:nvSpPr>
           <p:spPr>
             <a:xfrm>
-              <a:off x="4869202" y="2271201"/>
-              <a:ext cx="192485" cy="192485"/>
+              <a:off x="8168672" y="3028269"/>
+              <a:ext cx="256647" cy="256647"/>
             </a:xfrm>
             <a:prstGeom prst="rect">
               <a:avLst/>
@@ -14514,8 +14519,8 @@
           </p:nvSpPr>
           <p:spPr>
             <a:xfrm>
-              <a:off x="3908302" y="2463110"/>
-              <a:ext cx="192485" cy="192485"/>
+              <a:off x="6887472" y="3284148"/>
+              <a:ext cx="256647" cy="256647"/>
             </a:xfrm>
             <a:prstGeom prst="rect">
               <a:avLst/>
@@ -14573,8 +14578,8 @@
           </p:nvSpPr>
           <p:spPr>
             <a:xfrm>
-              <a:off x="4100787" y="2463110"/>
-              <a:ext cx="192485" cy="192485"/>
+              <a:off x="7144119" y="3284148"/>
+              <a:ext cx="256647" cy="256647"/>
             </a:xfrm>
             <a:prstGeom prst="rect">
               <a:avLst/>
@@ -14632,8 +14637,8 @@
           </p:nvSpPr>
           <p:spPr>
             <a:xfrm>
-              <a:off x="3908302" y="2655299"/>
-              <a:ext cx="192485" cy="192485"/>
+              <a:off x="6887472" y="3540400"/>
+              <a:ext cx="256647" cy="256647"/>
             </a:xfrm>
             <a:prstGeom prst="rect">
               <a:avLst/>
@@ -14691,8 +14696,8 @@
           </p:nvSpPr>
           <p:spPr>
             <a:xfrm>
-              <a:off x="4100787" y="2655299"/>
-              <a:ext cx="192485" cy="192485"/>
+              <a:off x="7144119" y="3540400"/>
+              <a:ext cx="256647" cy="256647"/>
             </a:xfrm>
             <a:prstGeom prst="rect">
               <a:avLst/>
@@ -14750,8 +14755,8 @@
           </p:nvSpPr>
           <p:spPr>
             <a:xfrm>
-              <a:off x="3908302" y="2847488"/>
-              <a:ext cx="192485" cy="192485"/>
+              <a:off x="6887472" y="3796652"/>
+              <a:ext cx="256647" cy="256647"/>
             </a:xfrm>
             <a:prstGeom prst="rect">
               <a:avLst/>
@@ -14809,8 +14814,8 @@
           </p:nvSpPr>
           <p:spPr>
             <a:xfrm>
-              <a:off x="4100787" y="2847488"/>
-              <a:ext cx="192485" cy="192485"/>
+              <a:off x="7144119" y="3796652"/>
+              <a:ext cx="256647" cy="256647"/>
             </a:xfrm>
             <a:prstGeom prst="rect">
               <a:avLst/>
@@ -14868,8 +14873,8 @@
           </p:nvSpPr>
           <p:spPr>
             <a:xfrm>
-              <a:off x="5061686" y="3622719"/>
-              <a:ext cx="192485" cy="192485"/>
+              <a:off x="8425318" y="4830293"/>
+              <a:ext cx="256647" cy="256647"/>
             </a:xfrm>
             <a:prstGeom prst="rect">
               <a:avLst/>
@@ -14929,8 +14934,8 @@
           </p:nvSpPr>
           <p:spPr>
             <a:xfrm>
-              <a:off x="5061686" y="2271201"/>
-              <a:ext cx="192485" cy="192485"/>
+              <a:off x="8425318" y="3028269"/>
+              <a:ext cx="256647" cy="256647"/>
             </a:xfrm>
             <a:prstGeom prst="rect">
               <a:avLst/>
@@ -14987,8 +14992,8 @@
           </p:nvSpPr>
           <p:spPr>
             <a:xfrm rot="10800000">
-              <a:off x="5254172" y="3426016"/>
-              <a:ext cx="192485" cy="192485"/>
+              <a:off x="8681966" y="4568022"/>
+              <a:ext cx="256647" cy="256647"/>
             </a:xfrm>
             <a:prstGeom prst="rect">
               <a:avLst/>
@@ -15048,8 +15053,8 @@
           </p:nvSpPr>
           <p:spPr>
             <a:xfrm rot="10800000">
-              <a:off x="5061687" y="3426016"/>
-              <a:ext cx="192485" cy="192485"/>
+              <a:off x="8425319" y="4568022"/>
+              <a:ext cx="256647" cy="256647"/>
             </a:xfrm>
             <a:prstGeom prst="rect">
               <a:avLst/>
@@ -15109,8 +15114,8 @@
           </p:nvSpPr>
           <p:spPr>
             <a:xfrm rot="10800000">
-              <a:off x="4869203" y="3426016"/>
-              <a:ext cx="192485" cy="192485"/>
+              <a:off x="8168674" y="4568022"/>
+              <a:ext cx="256647" cy="256647"/>
             </a:xfrm>
             <a:prstGeom prst="rect">
               <a:avLst/>
@@ -15170,8 +15175,8 @@
           </p:nvSpPr>
           <p:spPr>
             <a:xfrm rot="10800000">
-              <a:off x="4676718" y="3426016"/>
-              <a:ext cx="192485" cy="192485"/>
+              <a:off x="7912027" y="4568022"/>
+              <a:ext cx="256647" cy="256647"/>
             </a:xfrm>
             <a:prstGeom prst="rect">
               <a:avLst/>
@@ -15231,8 +15236,8 @@
           </p:nvSpPr>
           <p:spPr>
             <a:xfrm rot="10800000">
-              <a:off x="4484233" y="3426016"/>
-              <a:ext cx="192485" cy="192485"/>
+              <a:off x="7655380" y="4568022"/>
+              <a:ext cx="256647" cy="256647"/>
             </a:xfrm>
             <a:prstGeom prst="rect">
               <a:avLst/>
@@ -15292,8 +15297,8 @@
           </p:nvSpPr>
           <p:spPr>
             <a:xfrm rot="10800000">
-              <a:off x="4291749" y="3426016"/>
-              <a:ext cx="192485" cy="192485"/>
+              <a:off x="7398735" y="4568022"/>
+              <a:ext cx="256647" cy="256647"/>
             </a:xfrm>
             <a:prstGeom prst="rect">
               <a:avLst/>
@@ -15353,8 +15358,8 @@
           </p:nvSpPr>
           <p:spPr>
             <a:xfrm rot="10800000">
-              <a:off x="4100788" y="3424056"/>
-              <a:ext cx="192485" cy="192485"/>
+              <a:off x="7144120" y="4565409"/>
+              <a:ext cx="256647" cy="256647"/>
             </a:xfrm>
             <a:prstGeom prst="rect">
               <a:avLst/>
@@ -15414,8 +15419,8 @@
           </p:nvSpPr>
           <p:spPr>
             <a:xfrm rot="10800000">
-              <a:off x="3908303" y="3424056"/>
-              <a:ext cx="192485" cy="192485"/>
+              <a:off x="6887474" y="4565409"/>
+              <a:ext cx="256647" cy="256647"/>
             </a:xfrm>
             <a:prstGeom prst="rect">
               <a:avLst/>
@@ -15475,8 +15480,8 @@
           </p:nvSpPr>
           <p:spPr>
             <a:xfrm rot="10800000">
-              <a:off x="5061686" y="2848608"/>
-              <a:ext cx="192485" cy="192485"/>
+              <a:off x="8425318" y="3798145"/>
+              <a:ext cx="256647" cy="256647"/>
             </a:xfrm>
             <a:prstGeom prst="rect">
               <a:avLst/>
@@ -15534,8 +15539,8 @@
           </p:nvSpPr>
           <p:spPr>
             <a:xfrm rot="10800000">
-              <a:off x="4869202" y="2848608"/>
-              <a:ext cx="192485" cy="192485"/>
+              <a:off x="8168672" y="3798145"/>
+              <a:ext cx="256647" cy="256647"/>
             </a:xfrm>
             <a:prstGeom prst="rect">
               <a:avLst/>
@@ -15593,8 +15598,8 @@
           </p:nvSpPr>
           <p:spPr>
             <a:xfrm rot="10800000">
-              <a:off x="4676717" y="2848608"/>
-              <a:ext cx="192485" cy="192485"/>
+              <a:off x="7912026" y="3798145"/>
+              <a:ext cx="256647" cy="256647"/>
             </a:xfrm>
             <a:prstGeom prst="rect">
               <a:avLst/>
@@ -15652,8 +15657,8 @@
           </p:nvSpPr>
           <p:spPr>
             <a:xfrm rot="10800000">
-              <a:off x="4484232" y="2848608"/>
-              <a:ext cx="192485" cy="192485"/>
+              <a:off x="7655379" y="3798145"/>
+              <a:ext cx="256647" cy="256647"/>
             </a:xfrm>
             <a:prstGeom prst="rect">
               <a:avLst/>
@@ -15711,8 +15716,8 @@
           </p:nvSpPr>
           <p:spPr>
             <a:xfrm rot="10800000">
-              <a:off x="4291748" y="2848608"/>
-              <a:ext cx="192485" cy="192485"/>
+              <a:off x="7398734" y="3798145"/>
+              <a:ext cx="256647" cy="256647"/>
             </a:xfrm>
             <a:prstGeom prst="rect">
               <a:avLst/>
@@ -15770,8 +15775,8 @@
           </p:nvSpPr>
           <p:spPr>
             <a:xfrm rot="10800000">
-              <a:off x="5061686" y="2656139"/>
-              <a:ext cx="192485" cy="192485"/>
+              <a:off x="8425318" y="3541520"/>
+              <a:ext cx="256647" cy="256647"/>
             </a:xfrm>
             <a:prstGeom prst="rect">
               <a:avLst/>
@@ -15829,8 +15834,8 @@
           </p:nvSpPr>
           <p:spPr>
             <a:xfrm rot="10800000">
-              <a:off x="4869202" y="2656139"/>
-              <a:ext cx="192485" cy="192485"/>
+              <a:off x="8168672" y="3541520"/>
+              <a:ext cx="256647" cy="256647"/>
             </a:xfrm>
             <a:prstGeom prst="rect">
               <a:avLst/>
@@ -15888,8 +15893,8 @@
           </p:nvSpPr>
           <p:spPr>
             <a:xfrm rot="10800000">
-              <a:off x="4676717" y="2656139"/>
-              <a:ext cx="192485" cy="192485"/>
+              <a:off x="7912026" y="3541520"/>
+              <a:ext cx="256647" cy="256647"/>
             </a:xfrm>
             <a:prstGeom prst="rect">
               <a:avLst/>
@@ -15947,8 +15952,8 @@
           </p:nvSpPr>
           <p:spPr>
             <a:xfrm rot="10800000">
-              <a:off x="4484232" y="2656139"/>
-              <a:ext cx="192485" cy="192485"/>
+              <a:off x="7655379" y="3541520"/>
+              <a:ext cx="256647" cy="256647"/>
             </a:xfrm>
             <a:prstGeom prst="rect">
               <a:avLst/>
@@ -16006,8 +16011,8 @@
           </p:nvSpPr>
           <p:spPr>
             <a:xfrm rot="10800000">
-              <a:off x="4291748" y="2656139"/>
-              <a:ext cx="192485" cy="192485"/>
+              <a:off x="7398734" y="3541520"/>
+              <a:ext cx="256647" cy="256647"/>
             </a:xfrm>
             <a:prstGeom prst="rect">
               <a:avLst/>
@@ -16065,8 +16070,8 @@
           </p:nvSpPr>
           <p:spPr>
             <a:xfrm rot="10800000">
-              <a:off x="5061686" y="2463670"/>
-              <a:ext cx="192485" cy="192485"/>
+              <a:off x="8425318" y="3284894"/>
+              <a:ext cx="256647" cy="256647"/>
             </a:xfrm>
             <a:prstGeom prst="rect">
               <a:avLst/>
@@ -16124,8 +16129,8 @@
           </p:nvSpPr>
           <p:spPr>
             <a:xfrm rot="10800000">
-              <a:off x="4869202" y="2463670"/>
-              <a:ext cx="192485" cy="192485"/>
+              <a:off x="8168672" y="3284894"/>
+              <a:ext cx="256647" cy="256647"/>
             </a:xfrm>
             <a:prstGeom prst="rect">
               <a:avLst/>
@@ -16183,8 +16188,8 @@
           </p:nvSpPr>
           <p:spPr>
             <a:xfrm rot="10800000">
-              <a:off x="4676717" y="2463670"/>
-              <a:ext cx="192485" cy="192485"/>
+              <a:off x="7912026" y="3284894"/>
+              <a:ext cx="256647" cy="256647"/>
             </a:xfrm>
             <a:prstGeom prst="rect">
               <a:avLst/>
@@ -16242,8 +16247,8 @@
           </p:nvSpPr>
           <p:spPr>
             <a:xfrm rot="10800000">
-              <a:off x="4484232" y="2463670"/>
-              <a:ext cx="192485" cy="192485"/>
+              <a:off x="7655379" y="3284894"/>
+              <a:ext cx="256647" cy="256647"/>
             </a:xfrm>
             <a:prstGeom prst="rect">
               <a:avLst/>
@@ -16301,8 +16306,8 @@
           </p:nvSpPr>
           <p:spPr>
             <a:xfrm rot="10800000">
-              <a:off x="4291748" y="2463670"/>
-              <a:ext cx="192485" cy="192485"/>
+              <a:off x="7398734" y="3284894"/>
+              <a:ext cx="256647" cy="256647"/>
             </a:xfrm>
             <a:prstGeom prst="rect">
               <a:avLst/>
@@ -16346,251 +16351,601 @@
             </a:p>
           </p:txBody>
         </p:sp>
-        <p:cxnSp>
-          <p:nvCxnSpPr>
-            <p:cNvPr id="257" name="Straight Arrow Connector 256">
-              <a:extLst>
-                <a:ext uri="{FF2B5EF4-FFF2-40B4-BE49-F238E27FC236}">
-                  <a16:creationId xmlns:a16="http://schemas.microsoft.com/office/drawing/2014/main" id="{09D84283-3519-B748-B0ED-DCBA6735A3F5}"/>
-                </a:ext>
-              </a:extLst>
-            </p:cNvPr>
-            <p:cNvCxnSpPr/>
-            <p:nvPr/>
-          </p:nvCxnSpPr>
-          <p:spPr>
-            <a:xfrm>
-              <a:off x="3908465" y="3934918"/>
-              <a:ext cx="731207" cy="0"/>
-            </a:xfrm>
-            <a:prstGeom prst="straightConnector1">
-              <a:avLst/>
-            </a:prstGeom>
-            <a:ln>
-              <a:solidFill>
-                <a:srgbClr val="000000"/>
-              </a:solidFill>
-              <a:tailEnd type="triangle"/>
-            </a:ln>
-            <a:effectLst/>
-          </p:spPr>
-          <p:style>
-            <a:lnRef idx="2">
-              <a:schemeClr val="accent1"/>
-            </a:lnRef>
-            <a:fillRef idx="0">
-              <a:schemeClr val="accent1"/>
-            </a:fillRef>
-            <a:effectRef idx="1">
-              <a:schemeClr val="accent1"/>
-            </a:effectRef>
-            <a:fontRef idx="minor">
-              <a:schemeClr val="tx1"/>
-            </a:fontRef>
-          </p:style>
-        </p:cxnSp>
-        <p:sp>
-          <p:nvSpPr>
-            <p:cNvPr id="258" name="TextBox 257">
-              <a:extLst>
-                <a:ext uri="{FF2B5EF4-FFF2-40B4-BE49-F238E27FC236}">
-                  <a16:creationId xmlns:a16="http://schemas.microsoft.com/office/drawing/2014/main" id="{B2F56024-5B80-4847-B7C4-BF4E22C90464}"/>
-                </a:ext>
-              </a:extLst>
-            </p:cNvPr>
-            <p:cNvSpPr txBox="1"/>
-            <p:nvPr/>
-          </p:nvSpPr>
-          <p:spPr>
-            <a:xfrm>
-              <a:off x="4591838" y="3781656"/>
-              <a:ext cx="182984" cy="284742"/>
-            </a:xfrm>
-            <a:prstGeom prst="rect">
-              <a:avLst/>
-            </a:prstGeom>
-            <a:noFill/>
-          </p:spPr>
-          <p:txBody>
-            <a:bodyPr wrap="none" rtlCol="0">
-              <a:spAutoFit/>
-            </a:bodyPr>
-            <a:lstStyle/>
-            <a:p>
-              <a:pPr defTabSz="609585"/>
-              <a:r>
-                <a:rPr lang="en-US" sz="1867" b="1">
-                  <a:solidFill>
-                    <a:srgbClr val="001C3D"/>
-                  </a:solidFill>
-                  <a:latin typeface="Calibri"/>
-                </a:rPr>
-                <a:t>i</a:t>
-              </a:r>
-            </a:p>
-          </p:txBody>
-        </p:sp>
-        <p:cxnSp>
-          <p:nvCxnSpPr>
-            <p:cNvPr id="259" name="Straight Arrow Connector 258">
-              <a:extLst>
-                <a:ext uri="{FF2B5EF4-FFF2-40B4-BE49-F238E27FC236}">
-                  <a16:creationId xmlns:a16="http://schemas.microsoft.com/office/drawing/2014/main" id="{5CB56B27-4381-DF44-B868-4AAA80266995}"/>
-                </a:ext>
-              </a:extLst>
-            </p:cNvPr>
-            <p:cNvCxnSpPr>
-              <a:cxnSpLocks/>
-            </p:cNvCxnSpPr>
-            <p:nvPr/>
-          </p:nvCxnSpPr>
-          <p:spPr>
-            <a:xfrm rot="16200000">
-              <a:off x="3401501" y="3447738"/>
-              <a:ext cx="731207" cy="0"/>
-            </a:xfrm>
-            <a:prstGeom prst="straightConnector1">
-              <a:avLst/>
-            </a:prstGeom>
-            <a:ln>
-              <a:solidFill>
-                <a:srgbClr val="000000"/>
-              </a:solidFill>
-              <a:tailEnd type="triangle"/>
-            </a:ln>
-            <a:effectLst/>
-          </p:spPr>
-          <p:style>
-            <a:lnRef idx="2">
-              <a:schemeClr val="accent1"/>
-            </a:lnRef>
-            <a:fillRef idx="0">
-              <a:schemeClr val="accent1"/>
-            </a:fillRef>
-            <a:effectRef idx="1">
-              <a:schemeClr val="accent1"/>
-            </a:effectRef>
-            <a:fontRef idx="minor">
-              <a:schemeClr val="tx1"/>
-            </a:fontRef>
-          </p:style>
-        </p:cxnSp>
-        <p:sp>
-          <p:nvSpPr>
-            <p:cNvPr id="260" name="TextBox 259">
-              <a:extLst>
-                <a:ext uri="{FF2B5EF4-FFF2-40B4-BE49-F238E27FC236}">
-                  <a16:creationId xmlns:a16="http://schemas.microsoft.com/office/drawing/2014/main" id="{21189F3B-9D14-534D-BA64-BA0B096F0295}"/>
-                </a:ext>
-              </a:extLst>
-            </p:cNvPr>
-            <p:cNvSpPr txBox="1"/>
-            <p:nvPr/>
-          </p:nvSpPr>
-          <p:spPr>
-            <a:xfrm rot="16200000">
-              <a:off x="3640000" y="2866912"/>
-              <a:ext cx="184185" cy="284742"/>
-            </a:xfrm>
-            <a:prstGeom prst="rect">
-              <a:avLst/>
-            </a:prstGeom>
-            <a:noFill/>
-          </p:spPr>
-          <p:txBody>
-            <a:bodyPr wrap="none" rtlCol="0">
-              <a:spAutoFit/>
-            </a:bodyPr>
-            <a:lstStyle/>
-            <a:p>
-              <a:pPr defTabSz="609585"/>
-              <a:r>
-                <a:rPr lang="en-US" sz="1867" b="1">
-                  <a:solidFill>
-                    <a:srgbClr val="001C3D"/>
-                  </a:solidFill>
-                  <a:latin typeface="Calibri"/>
-                </a:rPr>
-                <a:t>j</a:t>
-              </a:r>
-            </a:p>
-          </p:txBody>
-        </p:sp>
-        <p:sp>
-          <p:nvSpPr>
-            <p:cNvPr id="262" name="Rectangle 261">
-              <a:extLst>
-                <a:ext uri="{FF2B5EF4-FFF2-40B4-BE49-F238E27FC236}">
-                  <a16:creationId xmlns:a16="http://schemas.microsoft.com/office/drawing/2014/main" id="{8DA52B04-501C-9D48-97F5-86C513FE6527}"/>
-                </a:ext>
-              </a:extLst>
-            </p:cNvPr>
-            <p:cNvSpPr/>
-            <p:nvPr/>
-          </p:nvSpPr>
-          <p:spPr>
-            <a:xfrm>
-              <a:off x="5598416" y="2225775"/>
-              <a:ext cx="2254415" cy="438581"/>
-            </a:xfrm>
-            <a:prstGeom prst="rect">
-              <a:avLst/>
-            </a:prstGeom>
-          </p:spPr>
-          <p:txBody>
-            <a:bodyPr wrap="none">
-              <a:spAutoFit/>
-            </a:bodyPr>
-            <a:lstStyle/>
-            <a:p>
-              <a:pPr defTabSz="609585"/>
-              <a:r>
-                <a:rPr lang="en-US" sz="1600">
-                  <a:solidFill>
-                    <a:srgbClr val="001C3D"/>
-                  </a:solidFill>
-                  <a:latin typeface="Calibri" panose="020F0502020204030204" pitchFamily="34" charset="0"/>
-                  <a:cs typeface="Calibri" panose="020F0502020204030204" pitchFamily="34" charset="0"/>
-                </a:rPr>
-                <a:t>Stride in i-direction is 4 bytes</a:t>
-              </a:r>
-            </a:p>
-            <a:p>
-              <a:pPr defTabSz="609585"/>
-              <a:r>
-                <a:rPr lang="en-US" sz="1600">
-                  <a:solidFill>
-                    <a:srgbClr val="001C3D"/>
-                  </a:solidFill>
-                  <a:latin typeface="Calibri" panose="020F0502020204030204" pitchFamily="34" charset="0"/>
-                  <a:cs typeface="Calibri" panose="020F0502020204030204" pitchFamily="34" charset="0"/>
-                </a:rPr>
-                <a:t>Stride in j-direction is 4 x </a:t>
-              </a:r>
-              <a:r>
-                <a:rPr lang="en-US" sz="1467">
-                  <a:solidFill>
-                    <a:srgbClr val="001C3D"/>
-                  </a:solidFill>
-                  <a:latin typeface="Courier New" panose="02070309020205020404" pitchFamily="49" charset="0"/>
-                  <a:cs typeface="Courier New" panose="02070309020205020404" pitchFamily="49" charset="0"/>
-                </a:rPr>
-                <a:t>nx</a:t>
-              </a:r>
-              <a:r>
-                <a:rPr lang="en-US" sz="1600">
-                  <a:solidFill>
-                    <a:srgbClr val="001C3D"/>
-                  </a:solidFill>
-                  <a:latin typeface="Calibri" panose="020F0502020204030204" pitchFamily="34" charset="0"/>
-                  <a:cs typeface="Calibri" panose="020F0502020204030204" pitchFamily="34" charset="0"/>
-                </a:rPr>
-                <a:t> bytes</a:t>
-              </a:r>
-            </a:p>
-          </p:txBody>
-        </p:sp>
       </p:grpSp>
+      <p:cxnSp>
+        <p:nvCxnSpPr>
+          <p:cNvPr id="257" name="Straight Arrow Connector 256">
+            <a:extLst>
+              <a:ext uri="{FF2B5EF4-FFF2-40B4-BE49-F238E27FC236}">
+                <a16:creationId xmlns:a16="http://schemas.microsoft.com/office/drawing/2014/main" id="{09D84283-3519-B748-B0ED-DCBA6735A3F5}"/>
+              </a:ext>
+            </a:extLst>
+          </p:cNvPr>
+          <p:cNvCxnSpPr/>
+          <p:nvPr/>
+        </p:nvCxnSpPr>
+        <p:spPr>
+          <a:xfrm>
+            <a:off x="6887690" y="3045618"/>
+            <a:ext cx="974943" cy="0"/>
+          </a:xfrm>
+          <a:prstGeom prst="straightConnector1">
+            <a:avLst/>
+          </a:prstGeom>
+          <a:ln>
+            <a:solidFill>
+              <a:srgbClr val="000000"/>
+            </a:solidFill>
+            <a:tailEnd type="triangle"/>
+          </a:ln>
+          <a:effectLst/>
+        </p:spPr>
+        <p:style>
+          <a:lnRef idx="2">
+            <a:schemeClr val="accent1"/>
+          </a:lnRef>
+          <a:fillRef idx="0">
+            <a:schemeClr val="accent1"/>
+          </a:fillRef>
+          <a:effectRef idx="1">
+            <a:schemeClr val="accent1"/>
+          </a:effectRef>
+          <a:fontRef idx="minor">
+            <a:schemeClr val="tx1"/>
+          </a:fontRef>
+        </p:style>
+      </p:cxnSp>
+      <p:sp>
+        <p:nvSpPr>
+          <p:cNvPr id="258" name="TextBox 257">
+            <a:extLst>
+              <a:ext uri="{FF2B5EF4-FFF2-40B4-BE49-F238E27FC236}">
+                <a16:creationId xmlns:a16="http://schemas.microsoft.com/office/drawing/2014/main" id="{B2F56024-5B80-4847-B7C4-BF4E22C90464}"/>
+              </a:ext>
+            </a:extLst>
+          </p:cNvPr>
+          <p:cNvSpPr txBox="1"/>
+          <p:nvPr/>
+        </p:nvSpPr>
+        <p:spPr>
+          <a:xfrm>
+            <a:off x="7798854" y="2841269"/>
+            <a:ext cx="245580" cy="379656"/>
+          </a:xfrm>
+          <a:prstGeom prst="rect">
+            <a:avLst/>
+          </a:prstGeom>
+          <a:noFill/>
+        </p:spPr>
+        <p:txBody>
+          <a:bodyPr wrap="none" rtlCol="0">
+            <a:spAutoFit/>
+          </a:bodyPr>
+          <a:lstStyle/>
+          <a:p>
+            <a:pPr defTabSz="609585"/>
+            <a:r>
+              <a:rPr lang="en-US" sz="1867" b="1">
+                <a:solidFill>
+                  <a:srgbClr val="001C3D"/>
+                </a:solidFill>
+                <a:latin typeface="Calibri"/>
+              </a:rPr>
+              <a:t>j</a:t>
+            </a:r>
+          </a:p>
+        </p:txBody>
+      </p:sp>
+      <p:cxnSp>
+        <p:nvCxnSpPr>
+          <p:cNvPr id="259" name="Straight Arrow Connector 258">
+            <a:extLst>
+              <a:ext uri="{FF2B5EF4-FFF2-40B4-BE49-F238E27FC236}">
+                <a16:creationId xmlns:a16="http://schemas.microsoft.com/office/drawing/2014/main" id="{5CB56B27-4381-DF44-B868-4AAA80266995}"/>
+              </a:ext>
+            </a:extLst>
+          </p:cNvPr>
+          <p:cNvCxnSpPr>
+            <a:cxnSpLocks/>
+          </p:cNvCxnSpPr>
+          <p:nvPr/>
+        </p:nvCxnSpPr>
+        <p:spPr>
+          <a:xfrm rot="5400000" flipV="1">
+            <a:off x="6239875" y="3721292"/>
+            <a:ext cx="974943" cy="0"/>
+          </a:xfrm>
+          <a:prstGeom prst="straightConnector1">
+            <a:avLst/>
+          </a:prstGeom>
+          <a:ln>
+            <a:solidFill>
+              <a:srgbClr val="000000"/>
+            </a:solidFill>
+            <a:tailEnd type="triangle"/>
+          </a:ln>
+          <a:effectLst/>
+        </p:spPr>
+        <p:style>
+          <a:lnRef idx="2">
+            <a:schemeClr val="accent1"/>
+          </a:lnRef>
+          <a:fillRef idx="0">
+            <a:schemeClr val="accent1"/>
+          </a:fillRef>
+          <a:effectRef idx="1">
+            <a:schemeClr val="accent1"/>
+          </a:effectRef>
+          <a:fontRef idx="minor">
+            <a:schemeClr val="tx1"/>
+          </a:fontRef>
+        </p:style>
+      </p:cxnSp>
+      <p:sp>
+        <p:nvSpPr>
+          <p:cNvPr id="260" name="TextBox 259">
+            <a:extLst>
+              <a:ext uri="{FF2B5EF4-FFF2-40B4-BE49-F238E27FC236}">
+                <a16:creationId xmlns:a16="http://schemas.microsoft.com/office/drawing/2014/main" id="{21189F3B-9D14-534D-BA64-BA0B096F0295}"/>
+              </a:ext>
+            </a:extLst>
+          </p:cNvPr>
+          <p:cNvSpPr txBox="1"/>
+          <p:nvPr/>
+        </p:nvSpPr>
+        <p:spPr>
+          <a:xfrm rot="16200000">
+            <a:off x="6586810" y="4142671"/>
+            <a:ext cx="243978" cy="379656"/>
+          </a:xfrm>
+          <a:prstGeom prst="rect">
+            <a:avLst/>
+          </a:prstGeom>
+          <a:noFill/>
+        </p:spPr>
+        <p:txBody>
+          <a:bodyPr wrap="none" rtlCol="0">
+            <a:spAutoFit/>
+          </a:bodyPr>
+          <a:lstStyle/>
+          <a:p>
+            <a:pPr defTabSz="609585"/>
+            <a:r>
+              <a:rPr lang="en-US" sz="1867" b="1">
+                <a:solidFill>
+                  <a:srgbClr val="001C3D"/>
+                </a:solidFill>
+                <a:latin typeface="Calibri"/>
+              </a:rPr>
+              <a:t>i</a:t>
+            </a:r>
+          </a:p>
+        </p:txBody>
+      </p:sp>
+      <p:sp>
+        <p:nvSpPr>
+          <p:cNvPr id="262" name="Rectangle 261">
+            <a:extLst>
+              <a:ext uri="{FF2B5EF4-FFF2-40B4-BE49-F238E27FC236}">
+                <a16:creationId xmlns:a16="http://schemas.microsoft.com/office/drawing/2014/main" id="{8DA52B04-501C-9D48-97F5-86C513FE6527}"/>
+              </a:ext>
+            </a:extLst>
+          </p:cNvPr>
+          <p:cNvSpPr/>
+          <p:nvPr/>
+        </p:nvSpPr>
+        <p:spPr>
+          <a:xfrm>
+            <a:off x="9140958" y="3136517"/>
+            <a:ext cx="3005886" cy="584775"/>
+          </a:xfrm>
+          <a:prstGeom prst="rect">
+            <a:avLst/>
+          </a:prstGeom>
+        </p:spPr>
+        <p:txBody>
+          <a:bodyPr wrap="none">
+            <a:spAutoFit/>
+          </a:bodyPr>
+          <a:lstStyle/>
+          <a:p>
+            <a:pPr defTabSz="609585"/>
+            <a:r>
+              <a:rPr lang="en-US" sz="1600">
+                <a:solidFill>
+                  <a:srgbClr val="001C3D"/>
+                </a:solidFill>
+                <a:latin typeface="Calibri" panose="020F0502020204030204" pitchFamily="34" charset="0"/>
+                <a:cs typeface="Calibri" panose="020F0502020204030204" pitchFamily="34" charset="0"/>
+              </a:rPr>
+              <a:t>Stride in i-direction is 4 bytes</a:t>
+            </a:r>
+          </a:p>
+          <a:p>
+            <a:pPr defTabSz="609585"/>
+            <a:r>
+              <a:rPr lang="en-US" sz="1600">
+                <a:solidFill>
+                  <a:srgbClr val="001C3D"/>
+                </a:solidFill>
+                <a:latin typeface="Calibri" panose="020F0502020204030204" pitchFamily="34" charset="0"/>
+                <a:cs typeface="Calibri" panose="020F0502020204030204" pitchFamily="34" charset="0"/>
+              </a:rPr>
+              <a:t>Stride in j-direction is 4 x </a:t>
+            </a:r>
+            <a:r>
+              <a:rPr lang="en-US" sz="1467">
+                <a:solidFill>
+                  <a:srgbClr val="001C3D"/>
+                </a:solidFill>
+                <a:latin typeface="Courier New" panose="02070309020205020404" pitchFamily="49" charset="0"/>
+                <a:cs typeface="Courier New" panose="02070309020205020404" pitchFamily="49" charset="0"/>
+              </a:rPr>
+              <a:t>nx</a:t>
+            </a:r>
+            <a:r>
+              <a:rPr lang="en-US" sz="1600">
+                <a:solidFill>
+                  <a:srgbClr val="001C3D"/>
+                </a:solidFill>
+                <a:latin typeface="Calibri" panose="020F0502020204030204" pitchFamily="34" charset="0"/>
+                <a:cs typeface="Calibri" panose="020F0502020204030204" pitchFamily="34" charset="0"/>
+              </a:rPr>
+              <a:t> bytes</a:t>
+            </a:r>
+          </a:p>
+        </p:txBody>
+      </p:sp>
+      <p:sp>
+        <p:nvSpPr>
+          <p:cNvPr id="4" name="TextBox 3">
+            <a:extLst>
+              <a:ext uri="{FF2B5EF4-FFF2-40B4-BE49-F238E27FC236}">
+                <a16:creationId xmlns:a16="http://schemas.microsoft.com/office/drawing/2014/main" id="{F279FEA1-85E6-EEE6-E60C-8FC36370DDE8}"/>
+              </a:ext>
+            </a:extLst>
+          </p:cNvPr>
+          <p:cNvSpPr txBox="1"/>
+          <p:nvPr/>
+        </p:nvSpPr>
+        <p:spPr>
+          <a:xfrm>
+            <a:off x="6850514" y="3220925"/>
+            <a:ext cx="328936" cy="230832"/>
+          </a:xfrm>
+          <a:prstGeom prst="rect">
+            <a:avLst/>
+          </a:prstGeom>
+          <a:noFill/>
+        </p:spPr>
+        <p:txBody>
+          <a:bodyPr wrap="none" rtlCol="0">
+            <a:spAutoFit/>
+          </a:bodyPr>
+          <a:lstStyle/>
+          <a:p>
+            <a:r>
+              <a:rPr lang="en-US" sz="900"/>
+              <a:t>1,1</a:t>
+            </a:r>
+          </a:p>
+        </p:txBody>
+      </p:sp>
+      <p:sp>
+        <p:nvSpPr>
+          <p:cNvPr id="5" name="TextBox 4">
+            <a:extLst>
+              <a:ext uri="{FF2B5EF4-FFF2-40B4-BE49-F238E27FC236}">
+                <a16:creationId xmlns:a16="http://schemas.microsoft.com/office/drawing/2014/main" id="{4F8E4629-DA49-C5CC-C5BE-60800CC5DFA8}"/>
+              </a:ext>
+            </a:extLst>
+          </p:cNvPr>
+          <p:cNvSpPr txBox="1"/>
+          <p:nvPr/>
+        </p:nvSpPr>
+        <p:spPr>
+          <a:xfrm>
+            <a:off x="6850514" y="3466458"/>
+            <a:ext cx="328936" cy="230832"/>
+          </a:xfrm>
+          <a:prstGeom prst="rect">
+            <a:avLst/>
+          </a:prstGeom>
+          <a:noFill/>
+        </p:spPr>
+        <p:txBody>
+          <a:bodyPr wrap="none" rtlCol="0">
+            <a:spAutoFit/>
+          </a:bodyPr>
+          <a:lstStyle/>
+          <a:p>
+            <a:r>
+              <a:rPr lang="en-US" sz="900"/>
+              <a:t>2,1</a:t>
+            </a:r>
+          </a:p>
+        </p:txBody>
+      </p:sp>
+      <p:sp>
+        <p:nvSpPr>
+          <p:cNvPr id="8" name="TextBox 7">
+            <a:extLst>
+              <a:ext uri="{FF2B5EF4-FFF2-40B4-BE49-F238E27FC236}">
+                <a16:creationId xmlns:a16="http://schemas.microsoft.com/office/drawing/2014/main" id="{34CF56F1-A708-811B-45C4-EECF47D452BA}"/>
+              </a:ext>
+            </a:extLst>
+          </p:cNvPr>
+          <p:cNvSpPr txBox="1"/>
+          <p:nvPr/>
+        </p:nvSpPr>
+        <p:spPr>
+          <a:xfrm>
+            <a:off x="6850514" y="3728924"/>
+            <a:ext cx="328936" cy="230832"/>
+          </a:xfrm>
+          <a:prstGeom prst="rect">
+            <a:avLst/>
+          </a:prstGeom>
+          <a:noFill/>
+        </p:spPr>
+        <p:txBody>
+          <a:bodyPr wrap="none" rtlCol="0">
+            <a:spAutoFit/>
+          </a:bodyPr>
+          <a:lstStyle/>
+          <a:p>
+            <a:r>
+              <a:rPr lang="en-US" sz="900"/>
+              <a:t>3,1</a:t>
+            </a:r>
+          </a:p>
+        </p:txBody>
+      </p:sp>
+      <p:sp>
+        <p:nvSpPr>
+          <p:cNvPr id="11" name="TextBox 10">
+            <a:extLst>
+              <a:ext uri="{FF2B5EF4-FFF2-40B4-BE49-F238E27FC236}">
+                <a16:creationId xmlns:a16="http://schemas.microsoft.com/office/drawing/2014/main" id="{2811767D-07E5-F09F-31E7-4EB7D40E4E07}"/>
+              </a:ext>
+            </a:extLst>
+          </p:cNvPr>
+          <p:cNvSpPr txBox="1"/>
+          <p:nvPr/>
+        </p:nvSpPr>
+        <p:spPr>
+          <a:xfrm>
+            <a:off x="6825113" y="4998924"/>
+            <a:ext cx="381836" cy="230832"/>
+          </a:xfrm>
+          <a:prstGeom prst="rect">
+            <a:avLst/>
+          </a:prstGeom>
+          <a:noFill/>
+        </p:spPr>
+        <p:txBody>
+          <a:bodyPr wrap="none" rtlCol="0">
+            <a:spAutoFit/>
+          </a:bodyPr>
+          <a:lstStyle/>
+          <a:p>
+            <a:r>
+              <a:rPr lang="en-US" sz="900"/>
+              <a:t>nx,1</a:t>
+            </a:r>
+          </a:p>
+        </p:txBody>
+      </p:sp>
+      <p:sp>
+        <p:nvSpPr>
+          <p:cNvPr id="17" name="TextBox 16">
+            <a:extLst>
+              <a:ext uri="{FF2B5EF4-FFF2-40B4-BE49-F238E27FC236}">
+                <a16:creationId xmlns:a16="http://schemas.microsoft.com/office/drawing/2014/main" id="{24DE9DC9-D818-AC1A-02D3-BDB03931E6A6}"/>
+              </a:ext>
+            </a:extLst>
+          </p:cNvPr>
+          <p:cNvSpPr txBox="1"/>
+          <p:nvPr/>
+        </p:nvSpPr>
+        <p:spPr>
+          <a:xfrm>
+            <a:off x="7112981" y="3220925"/>
+            <a:ext cx="328936" cy="230832"/>
+          </a:xfrm>
+          <a:prstGeom prst="rect">
+            <a:avLst/>
+          </a:prstGeom>
+          <a:noFill/>
+        </p:spPr>
+        <p:txBody>
+          <a:bodyPr wrap="none" rtlCol="0">
+            <a:spAutoFit/>
+          </a:bodyPr>
+          <a:lstStyle/>
+          <a:p>
+            <a:r>
+              <a:rPr lang="en-US" sz="900"/>
+              <a:t>1,2</a:t>
+            </a:r>
+          </a:p>
+        </p:txBody>
+      </p:sp>
+      <p:sp>
+        <p:nvSpPr>
+          <p:cNvPr id="18" name="TextBox 17">
+            <a:extLst>
+              <a:ext uri="{FF2B5EF4-FFF2-40B4-BE49-F238E27FC236}">
+                <a16:creationId xmlns:a16="http://schemas.microsoft.com/office/drawing/2014/main" id="{14640FA8-2C83-73B8-0FE8-B1EF7B790A30}"/>
+              </a:ext>
+            </a:extLst>
+          </p:cNvPr>
+          <p:cNvSpPr txBox="1"/>
+          <p:nvPr/>
+        </p:nvSpPr>
+        <p:spPr>
+          <a:xfrm>
+            <a:off x="7366981" y="3220925"/>
+            <a:ext cx="328936" cy="230832"/>
+          </a:xfrm>
+          <a:prstGeom prst="rect">
+            <a:avLst/>
+          </a:prstGeom>
+          <a:noFill/>
+        </p:spPr>
+        <p:txBody>
+          <a:bodyPr wrap="none" rtlCol="0">
+            <a:spAutoFit/>
+          </a:bodyPr>
+          <a:lstStyle/>
+          <a:p>
+            <a:r>
+              <a:rPr lang="en-US" sz="900"/>
+              <a:t>1,3</a:t>
+            </a:r>
+          </a:p>
+        </p:txBody>
+      </p:sp>
+      <p:sp>
+        <p:nvSpPr>
+          <p:cNvPr id="19" name="TextBox 18">
+            <a:extLst>
+              <a:ext uri="{FF2B5EF4-FFF2-40B4-BE49-F238E27FC236}">
+                <a16:creationId xmlns:a16="http://schemas.microsoft.com/office/drawing/2014/main" id="{4EFA5534-A65D-1AFD-4A8D-86C46AFD6276}"/>
+              </a:ext>
+            </a:extLst>
+          </p:cNvPr>
+          <p:cNvSpPr txBox="1"/>
+          <p:nvPr/>
+        </p:nvSpPr>
+        <p:spPr>
+          <a:xfrm>
+            <a:off x="8628513" y="3220925"/>
+            <a:ext cx="385042" cy="230832"/>
+          </a:xfrm>
+          <a:prstGeom prst="rect">
+            <a:avLst/>
+          </a:prstGeom>
+          <a:noFill/>
+        </p:spPr>
+        <p:txBody>
+          <a:bodyPr wrap="none" rtlCol="0">
+            <a:spAutoFit/>
+          </a:bodyPr>
+          <a:lstStyle/>
+          <a:p>
+            <a:r>
+              <a:rPr lang="en-US" sz="900"/>
+              <a:t>1,ny</a:t>
+            </a:r>
+          </a:p>
+        </p:txBody>
+      </p:sp>
+      <p:sp>
+        <p:nvSpPr>
+          <p:cNvPr id="20" name="TextBox 19">
+            <a:extLst>
+              <a:ext uri="{FF2B5EF4-FFF2-40B4-BE49-F238E27FC236}">
+                <a16:creationId xmlns:a16="http://schemas.microsoft.com/office/drawing/2014/main" id="{A5CB7782-8716-C984-E5A6-B036B03A091A}"/>
+              </a:ext>
+            </a:extLst>
+          </p:cNvPr>
+          <p:cNvSpPr txBox="1"/>
+          <p:nvPr/>
+        </p:nvSpPr>
+        <p:spPr>
+          <a:xfrm>
+            <a:off x="7663316" y="3220925"/>
+            <a:ext cx="271228" cy="230832"/>
+          </a:xfrm>
+          <a:prstGeom prst="rect">
+            <a:avLst/>
+          </a:prstGeom>
+          <a:noFill/>
+        </p:spPr>
+        <p:txBody>
+          <a:bodyPr wrap="none" rtlCol="0">
+            <a:spAutoFit/>
+          </a:bodyPr>
+          <a:lstStyle/>
+          <a:p>
+            <a:r>
+              <a:rPr lang="en-US" sz="900"/>
+              <a:t>…</a:t>
+            </a:r>
+          </a:p>
+        </p:txBody>
+      </p:sp>
+      <p:sp>
+        <p:nvSpPr>
+          <p:cNvPr id="26" name="TextBox 25">
+            <a:extLst>
+              <a:ext uri="{FF2B5EF4-FFF2-40B4-BE49-F238E27FC236}">
+                <a16:creationId xmlns:a16="http://schemas.microsoft.com/office/drawing/2014/main" id="{1EFDD4F8-74B2-CBBE-BA17-F30733F2EBB5}"/>
+              </a:ext>
+            </a:extLst>
+          </p:cNvPr>
+          <p:cNvSpPr txBox="1"/>
+          <p:nvPr/>
+        </p:nvSpPr>
+        <p:spPr>
+          <a:xfrm>
+            <a:off x="6867445" y="3997738"/>
+            <a:ext cx="271228" cy="230832"/>
+          </a:xfrm>
+          <a:prstGeom prst="rect">
+            <a:avLst/>
+          </a:prstGeom>
+          <a:noFill/>
+        </p:spPr>
+        <p:txBody>
+          <a:bodyPr wrap="none" rtlCol="0">
+            <a:spAutoFit/>
+          </a:bodyPr>
+          <a:lstStyle/>
+          <a:p>
+            <a:r>
+              <a:rPr lang="en-US" sz="900"/>
+              <a:t>…</a:t>
+            </a:r>
+          </a:p>
+        </p:txBody>
+      </p:sp>
+      <p:sp>
+        <p:nvSpPr>
+          <p:cNvPr id="27" name="TextBox 26">
+            <a:extLst>
+              <a:ext uri="{FF2B5EF4-FFF2-40B4-BE49-F238E27FC236}">
+                <a16:creationId xmlns:a16="http://schemas.microsoft.com/office/drawing/2014/main" id="{42A49076-B6F0-8A70-8B11-C5E271D6DE76}"/>
+              </a:ext>
+            </a:extLst>
+          </p:cNvPr>
+          <p:cNvSpPr txBox="1"/>
+          <p:nvPr/>
+        </p:nvSpPr>
+        <p:spPr>
+          <a:xfrm>
+            <a:off x="7968116" y="3525725"/>
+            <a:ext cx="271228" cy="230832"/>
+          </a:xfrm>
+          <a:prstGeom prst="rect">
+            <a:avLst/>
+          </a:prstGeom>
+          <a:noFill/>
+        </p:spPr>
+        <p:txBody>
+          <a:bodyPr wrap="none" rtlCol="0">
+            <a:spAutoFit/>
+          </a:bodyPr>
+          <a:lstStyle/>
+          <a:p>
+            <a:r>
+              <a:rPr lang="en-US" sz="900"/>
+              <a:t>…</a:t>
+            </a:r>
+          </a:p>
+        </p:txBody>
+      </p:sp>
     </p:spTree>
     <p:extLst>
       <p:ext uri="{BB962C8B-B14F-4D97-AF65-F5344CB8AC3E}">
@@ -16661,33 +17016,6 @@
                                     <p:set>
                                       <p:cBhvr>
                                         <p:cTn id="8" dur="1" fill="hold">
-                                          <p:stCondLst>
-                                            <p:cond delay="0"/>
-                                          </p:stCondLst>
-                                        </p:cTn>
-                                        <p:tgtEl>
-                                          <p:spTgt spid="16"/>
-                                        </p:tgtEl>
-                                        <p:attrNameLst>
-                                          <p:attrName>style.visibility</p:attrName>
-                                        </p:attrNameLst>
-                                      </p:cBhvr>
-                                      <p:to>
-                                        <p:strVal val="visible"/>
-                                      </p:to>
-                                    </p:set>
-                                  </p:childTnLst>
-                                </p:cTn>
-                              </p:par>
-                              <p:par>
-                                <p:cTn id="9" presetID="1" presetClass="entr" presetSubtype="0" fill="hold" nodeType="withEffect">
-                                  <p:stCondLst>
-                                    <p:cond delay="0"/>
-                                  </p:stCondLst>
-                                  <p:childTnLst>
-                                    <p:set>
-                                      <p:cBhvr>
-                                        <p:cTn id="10" dur="1" fill="hold">
                                           <p:stCondLst>
                                             <p:cond delay="0"/>
                                           </p:stCondLst>
